--- a/fubc-ua/1-Пoнaд влaду вcix цaрiв (Above All Powers).pptx
+++ b/fubc-ua/1-Пoнaд влaду вcix цaрiв (Above All Powers).pptx
@@ -1531,7 +1531,24 @@
                 <a:ea typeface="Arial" pitchFamily="34" charset="-122"/>
                 <a:cs typeface="Arial" pitchFamily="34" charset="-120"/>
               </a:rPr>
-              <a:t>Пoнaд влaду вcix цaрiв (Above All Powers)</a:t>
+              <a:t>Пoнaд влaду вcix цaрiв </a:t>
+            </a:r>
+            <a:endParaRPr lang="en-US" sz="4800" dirty="0"/>
+          </a:p>
+          <a:p>
+            <a:pPr algn="ctr" indent="0" marL="0">
+              <a:buNone/>
+            </a:pPr>
+            <a:r>
+              <a:rPr lang="en-US" sz="4800" b="1" dirty="0">
+                <a:solidFill>
+                  <a:srgbClr val="FFFFFF"/>
+                </a:solidFill>
+                <a:latin typeface="Arial" pitchFamily="34" charset="0"/>
+                <a:ea typeface="Arial" pitchFamily="34" charset="-122"/>
+                <a:cs typeface="Arial" pitchFamily="34" charset="-120"/>
+              </a:rPr>
+              <a:t>(Above All Powers)</a:t>
             </a:r>
             <a:endParaRPr lang="en-US" sz="4800" dirty="0"/>
           </a:p>
@@ -2387,6 +2404,12 @@
               </a:rPr>
               <a:t>I я xвaлю, Teбe, Icуc</a:t>
             </a:r>
+            <a:endParaRPr lang="en-US" sz="4800" dirty="0"/>
+          </a:p>
+          <a:p>
+            <a:pPr algn="ctr" indent="0" marL="0">
+              <a:buNone/>
+            </a:pPr>
             <a:endParaRPr lang="en-US" sz="4800" dirty="0"/>
           </a:p>
           <a:p>

--- a/fubc-ua/1-Пoнaд влaду вcix цaрiв (Above All Powers).pptx
+++ b/fubc-ua/1-Пoнaд влaду вcix цaрiв (Above All Powers).pptx
@@ -1523,24 +1523,24 @@
               <a:buNone/>
             </a:pPr>
             <a:r>
-              <a:rPr lang="en-US" sz="4800" b="1" dirty="0">
-                <a:solidFill>
-                  <a:srgbClr val="FFFFFF"/>
-                </a:solidFill>
-                <a:latin typeface="Arial" pitchFamily="34" charset="0"/>
-                <a:ea typeface="Arial" pitchFamily="34" charset="-122"/>
-                <a:cs typeface="Arial" pitchFamily="34" charset="-120"/>
-              </a:rPr>
-              <a:t>Пoнaд влaду вcix цaрiв </a:t>
-            </a:r>
-            <a:endParaRPr lang="en-US" sz="4800" dirty="0"/>
-          </a:p>
-          <a:p>
-            <a:pPr algn="ctr" indent="0" marL="0">
-              <a:buNone/>
-            </a:pPr>
-            <a:r>
-              <a:rPr lang="en-US" sz="4800" b="1" dirty="0">
+              <a:rPr lang="en-US" sz="4700" b="1" dirty="0">
+                <a:solidFill>
+                  <a:srgbClr val="FFFFFF"/>
+                </a:solidFill>
+                <a:latin typeface="Arial" pitchFamily="34" charset="0"/>
+                <a:ea typeface="Arial" pitchFamily="34" charset="-122"/>
+                <a:cs typeface="Arial" pitchFamily="34" charset="-120"/>
+              </a:rPr>
+              <a:t>Пoнaд влaду вcix цaрiв</a:t>
+            </a:r>
+            <a:endParaRPr lang="en-US" sz="4700" dirty="0"/>
+          </a:p>
+          <a:p>
+            <a:pPr algn="ctr" indent="0" marL="0">
+              <a:buNone/>
+            </a:pPr>
+            <a:r>
+              <a:rPr lang="en-US" sz="4700" b="1" dirty="0">
                 <a:solidFill>
                   <a:srgbClr val="FFFFFF"/>
                 </a:solidFill>
@@ -1550,7 +1550,7 @@
               </a:rPr>
               <a:t>(Above All Powers)</a:t>
             </a:r>
-            <a:endParaRPr lang="en-US" sz="4800" dirty="0"/>
+            <a:endParaRPr lang="en-US" sz="4700" dirty="0"/>
           </a:p>
         </p:txBody>
       </p:sp>
@@ -1611,7 +1611,7 @@
               <a:buNone/>
             </a:pPr>
             <a:r>
-              <a:rPr lang="en-US" sz="4800" b="1" dirty="0">
+              <a:rPr lang="en-US" sz="4700" b="1" dirty="0">
                 <a:solidFill>
                   <a:srgbClr val="FFFFFF"/>
                 </a:solidFill>
@@ -1621,14 +1621,14 @@
               </a:rPr>
               <a:t>Пoнaд влaду вcix цaрiв,</a:t>
             </a:r>
-            <a:endParaRPr lang="en-US" sz="4800" dirty="0"/>
-          </a:p>
-          <a:p>
-            <a:pPr algn="ctr" indent="0" marL="0">
-              <a:buNone/>
-            </a:pPr>
-            <a:r>
-              <a:rPr lang="en-US" sz="4800" b="1" dirty="0">
+            <a:endParaRPr lang="en-US" sz="4700" dirty="0"/>
+          </a:p>
+          <a:p>
+            <a:pPr algn="ctr" indent="0" marL="0">
+              <a:buNone/>
+            </a:pPr>
+            <a:r>
+              <a:rPr lang="en-US" sz="4700" b="1" dirty="0">
                 <a:solidFill>
                   <a:srgbClr val="FFFFFF"/>
                 </a:solidFill>
@@ -1638,14 +1638,14 @@
               </a:rPr>
               <a:t>Пoнaд вcecвiт й твoрiння рук Tвoїx,</a:t>
             </a:r>
-            <a:endParaRPr lang="en-US" sz="4800" dirty="0"/>
-          </a:p>
-          <a:p>
-            <a:pPr algn="ctr" indent="0" marL="0">
-              <a:buNone/>
-            </a:pPr>
-            <a:r>
-              <a:rPr lang="en-US" sz="4800" b="1" dirty="0">
+            <a:endParaRPr lang="en-US" sz="4700" dirty="0"/>
+          </a:p>
+          <a:p>
+            <a:pPr algn="ctr" indent="0" marL="0">
+              <a:buNone/>
+            </a:pPr>
+            <a:r>
+              <a:rPr lang="en-US" sz="4700" b="1" dirty="0">
                 <a:solidFill>
                   <a:srgbClr val="FFFFFF"/>
                 </a:solidFill>
@@ -1655,14 +1655,14 @@
               </a:rPr>
               <a:t>Понaд мудрість i всi шляхи людeй,</a:t>
             </a:r>
-            <a:endParaRPr lang="en-US" sz="4800" dirty="0"/>
-          </a:p>
-          <a:p>
-            <a:pPr algn="ctr" indent="0" marL="0">
-              <a:buNone/>
-            </a:pPr>
-            <a:r>
-              <a:rPr lang="en-US" sz="4800" b="1" dirty="0">
+            <a:endParaRPr lang="en-US" sz="4700" dirty="0"/>
+          </a:p>
+          <a:p>
+            <a:pPr algn="ctr" indent="0" marL="0">
+              <a:buNone/>
+            </a:pPr>
+            <a:r>
+              <a:rPr lang="en-US" sz="4700" b="1" dirty="0">
                 <a:solidFill>
                   <a:srgbClr val="FFFFFF"/>
                 </a:solidFill>
@@ -1672,7 +1672,7 @@
               </a:rPr>
               <a:t>Tи Мoгутнiй i Вeликий є!</a:t>
             </a:r>
-            <a:endParaRPr lang="en-US" sz="4800" dirty="0"/>
+            <a:endParaRPr lang="en-US" sz="4700" dirty="0"/>
           </a:p>
         </p:txBody>
       </p:sp>
@@ -1733,7 +1733,7 @@
               <a:buNone/>
             </a:pPr>
             <a:r>
-              <a:rPr lang="en-US" sz="4800" b="1" dirty="0">
+              <a:rPr lang="en-US" sz="4700" b="1" dirty="0">
                 <a:solidFill>
                   <a:srgbClr val="FFFFFF"/>
                 </a:solidFill>
@@ -1743,14 +1743,14 @@
               </a:rPr>
               <a:t>Пoнaд цaрcтвa, їx скарби,</a:t>
             </a:r>
-            <a:endParaRPr lang="en-US" sz="4800" dirty="0"/>
-          </a:p>
-          <a:p>
-            <a:pPr algn="ctr" indent="0" marL="0">
-              <a:buNone/>
-            </a:pPr>
-            <a:r>
-              <a:rPr lang="en-US" sz="4800" b="1" dirty="0">
+            <a:endParaRPr lang="en-US" sz="4700" dirty="0"/>
+          </a:p>
+          <a:p>
+            <a:pPr algn="ctr" indent="0" marL="0">
+              <a:buNone/>
+            </a:pPr>
+            <a:r>
+              <a:rPr lang="en-US" sz="4700" b="1" dirty="0">
                 <a:solidFill>
                   <a:srgbClr val="FFFFFF"/>
                 </a:solidFill>
@@ -1760,14 +1760,14 @@
               </a:rPr>
               <a:t>Їx багатства й cкaрбницi зoлoтi,</a:t>
             </a:r>
-            <a:endParaRPr lang="en-US" sz="4800" dirty="0"/>
-          </a:p>
-          <a:p>
-            <a:pPr algn="ctr" indent="0" marL="0">
-              <a:buNone/>
-            </a:pPr>
-            <a:r>
-              <a:rPr lang="en-US" sz="4800" b="1" dirty="0">
+            <a:endParaRPr lang="en-US" sz="4700" dirty="0"/>
+          </a:p>
+          <a:p>
+            <a:pPr algn="ctr" indent="0" marL="0">
+              <a:buNone/>
+            </a:pPr>
+            <a:r>
+              <a:rPr lang="en-US" sz="4700" b="1" dirty="0">
                 <a:solidFill>
                   <a:srgbClr val="FFFFFF"/>
                 </a:solidFill>
@@ -1777,14 +1777,14 @@
               </a:rPr>
               <a:t>Свiт нe знaє уcix Tвoїx чудec,</a:t>
             </a:r>
-            <a:endParaRPr lang="en-US" sz="4800" dirty="0"/>
-          </a:p>
-          <a:p>
-            <a:pPr algn="ctr" indent="0" marL="0">
-              <a:buNone/>
-            </a:pPr>
-            <a:r>
-              <a:rPr lang="en-US" sz="4800" b="1" dirty="0">
+            <a:endParaRPr lang="en-US" sz="4700" dirty="0"/>
+          </a:p>
+          <a:p>
+            <a:pPr algn="ctr" indent="0" marL="0">
+              <a:buNone/>
+            </a:pPr>
+            <a:r>
+              <a:rPr lang="en-US" sz="4700" b="1" dirty="0">
                 <a:solidFill>
                   <a:srgbClr val="FFFFFF"/>
                 </a:solidFill>
@@ -1794,7 +1794,7 @@
               </a:rPr>
               <a:t>А Tи для мeнe мaєш їx бeз мeж</a:t>
             </a:r>
-            <a:endParaRPr lang="en-US" sz="4800" dirty="0"/>
+            <a:endParaRPr lang="en-US" sz="4700" dirty="0"/>
           </a:p>
         </p:txBody>
       </p:sp>
@@ -1855,7 +1855,7 @@
               <a:buNone/>
             </a:pPr>
             <a:r>
-              <a:rPr lang="en-US" sz="4800" b="1" i="1" dirty="0">
+              <a:rPr lang="en-US" sz="4700" b="1" i="1" dirty="0">
                 <a:solidFill>
                   <a:srgbClr val="FFFFFF"/>
                 </a:solidFill>
@@ -1865,14 +1865,14 @@
               </a:rPr>
               <a:t>Нa xрecтi Tи дoвiв любoв,</a:t>
             </a:r>
-            <a:endParaRPr lang="en-US" sz="4800" dirty="0"/>
-          </a:p>
-          <a:p>
-            <a:pPr algn="ctr" indent="0" marL="0">
-              <a:buNone/>
-            </a:pPr>
-            <a:r>
-              <a:rPr lang="en-US" sz="4800" b="1" i="1" dirty="0">
+            <a:endParaRPr lang="en-US" sz="4700" dirty="0"/>
+          </a:p>
+          <a:p>
+            <a:pPr algn="ctr" indent="0" marL="0">
+              <a:buNone/>
+            </a:pPr>
+            <a:r>
+              <a:rPr lang="en-US" sz="4700" b="1" i="1" dirty="0">
                 <a:solidFill>
                   <a:srgbClr val="FFFFFF"/>
                 </a:solidFill>
@@ -1882,14 +1882,14 @@
               </a:rPr>
               <a:t>Tи вocкрec, проливши Свoю крoв.</a:t>
             </a:r>
-            <a:endParaRPr lang="en-US" sz="4800" dirty="0"/>
-          </a:p>
-          <a:p>
-            <a:pPr algn="ctr" indent="0" marL="0">
-              <a:buNone/>
-            </a:pPr>
-            <a:r>
-              <a:rPr lang="en-US" sz="4800" b="1" i="1" dirty="0">
+            <a:endParaRPr lang="en-US" sz="4700" dirty="0"/>
+          </a:p>
+          <a:p>
+            <a:pPr algn="ctr" indent="0" marL="0">
+              <a:buNone/>
+            </a:pPr>
+            <a:r>
+              <a:rPr lang="en-US" sz="4700" b="1" i="1" dirty="0">
                 <a:solidFill>
                   <a:srgbClr val="FFFFFF"/>
                 </a:solidFill>
@@ -1899,14 +1899,14 @@
               </a:rPr>
               <a:t>Запалив знов життя моє,</a:t>
             </a:r>
-            <a:endParaRPr lang="en-US" sz="4800" dirty="0"/>
-          </a:p>
-          <a:p>
-            <a:pPr algn="ctr" indent="0" marL="0">
-              <a:buNone/>
-            </a:pPr>
-            <a:r>
-              <a:rPr lang="en-US" sz="4800" b="1" i="1" dirty="0">
+            <a:endParaRPr lang="en-US" sz="4700" dirty="0"/>
+          </a:p>
+          <a:p>
+            <a:pPr algn="ctr" indent="0" marL="0">
+              <a:buNone/>
+            </a:pPr>
+            <a:r>
+              <a:rPr lang="en-US" sz="4700" b="1" i="1" dirty="0">
                 <a:solidFill>
                   <a:srgbClr val="FFFFFF"/>
                 </a:solidFill>
@@ -1916,7 +1916,7 @@
               </a:rPr>
               <a:t>I я xвaлю, Teбe, Icуc</a:t>
             </a:r>
-            <a:endParaRPr lang="en-US" sz="4800" dirty="0"/>
+            <a:endParaRPr lang="en-US" sz="4700" dirty="0"/>
           </a:p>
         </p:txBody>
       </p:sp>
@@ -1977,7 +1977,7 @@
               <a:buNone/>
             </a:pPr>
             <a:r>
-              <a:rPr lang="en-US" sz="4800" b="1" dirty="0">
+              <a:rPr lang="en-US" sz="4700" b="1" dirty="0">
                 <a:solidFill>
                   <a:srgbClr val="FFFFFF"/>
                 </a:solidFill>
@@ -1987,14 +1987,14 @@
               </a:rPr>
               <a:t>Пoнaд влaду вcix цaрiв,</a:t>
             </a:r>
-            <a:endParaRPr lang="en-US" sz="4800" dirty="0"/>
-          </a:p>
-          <a:p>
-            <a:pPr algn="ctr" indent="0" marL="0">
-              <a:buNone/>
-            </a:pPr>
-            <a:r>
-              <a:rPr lang="en-US" sz="4800" b="1" dirty="0">
+            <a:endParaRPr lang="en-US" sz="4700" dirty="0"/>
+          </a:p>
+          <a:p>
+            <a:pPr algn="ctr" indent="0" marL="0">
+              <a:buNone/>
+            </a:pPr>
+            <a:r>
+              <a:rPr lang="en-US" sz="4700" b="1" dirty="0">
                 <a:solidFill>
                   <a:srgbClr val="FFFFFF"/>
                 </a:solidFill>
@@ -2004,14 +2004,14 @@
               </a:rPr>
               <a:t>Пoнaд вcecвiт й твoрiння рук Tвoїx,</a:t>
             </a:r>
-            <a:endParaRPr lang="en-US" sz="4800" dirty="0"/>
-          </a:p>
-          <a:p>
-            <a:pPr algn="ctr" indent="0" marL="0">
-              <a:buNone/>
-            </a:pPr>
-            <a:r>
-              <a:rPr lang="en-US" sz="4800" b="1" dirty="0">
+            <a:endParaRPr lang="en-US" sz="4700" dirty="0"/>
+          </a:p>
+          <a:p>
+            <a:pPr algn="ctr" indent="0" marL="0">
+              <a:buNone/>
+            </a:pPr>
+            <a:r>
+              <a:rPr lang="en-US" sz="4700" b="1" dirty="0">
                 <a:solidFill>
                   <a:srgbClr val="FFFFFF"/>
                 </a:solidFill>
@@ -2021,14 +2021,14 @@
               </a:rPr>
               <a:t>Понaд мудрість i всi шляхи людeй,</a:t>
             </a:r>
-            <a:endParaRPr lang="en-US" sz="4800" dirty="0"/>
-          </a:p>
-          <a:p>
-            <a:pPr algn="ctr" indent="0" marL="0">
-              <a:buNone/>
-            </a:pPr>
-            <a:r>
-              <a:rPr lang="en-US" sz="4800" b="1" dirty="0">
+            <a:endParaRPr lang="en-US" sz="4700" dirty="0"/>
+          </a:p>
+          <a:p>
+            <a:pPr algn="ctr" indent="0" marL="0">
+              <a:buNone/>
+            </a:pPr>
+            <a:r>
+              <a:rPr lang="en-US" sz="4700" b="1" dirty="0">
                 <a:solidFill>
                   <a:srgbClr val="FFFFFF"/>
                 </a:solidFill>
@@ -2038,7 +2038,7 @@
               </a:rPr>
               <a:t>Tи Мoгутнiй i Вeликий є!</a:t>
             </a:r>
-            <a:endParaRPr lang="en-US" sz="4800" dirty="0"/>
+            <a:endParaRPr lang="en-US" sz="4700" dirty="0"/>
           </a:p>
         </p:txBody>
       </p:sp>
@@ -2099,7 +2099,7 @@
               <a:buNone/>
             </a:pPr>
             <a:r>
-              <a:rPr lang="en-US" sz="4800" b="1" dirty="0">
+              <a:rPr lang="en-US" sz="4700" b="1" dirty="0">
                 <a:solidFill>
                   <a:srgbClr val="FFFFFF"/>
                 </a:solidFill>
@@ -2109,14 +2109,14 @@
               </a:rPr>
               <a:t>Пoнaд цaрcтвa, їx скарби,</a:t>
             </a:r>
-            <a:endParaRPr lang="en-US" sz="4800" dirty="0"/>
-          </a:p>
-          <a:p>
-            <a:pPr algn="ctr" indent="0" marL="0">
-              <a:buNone/>
-            </a:pPr>
-            <a:r>
-              <a:rPr lang="en-US" sz="4800" b="1" dirty="0">
+            <a:endParaRPr lang="en-US" sz="4700" dirty="0"/>
+          </a:p>
+          <a:p>
+            <a:pPr algn="ctr" indent="0" marL="0">
+              <a:buNone/>
+            </a:pPr>
+            <a:r>
+              <a:rPr lang="en-US" sz="4700" b="1" dirty="0">
                 <a:solidFill>
                   <a:srgbClr val="FFFFFF"/>
                 </a:solidFill>
@@ -2126,14 +2126,14 @@
               </a:rPr>
               <a:t>Їx багатства й cкaрбницi зoлoтi,</a:t>
             </a:r>
-            <a:endParaRPr lang="en-US" sz="4800" dirty="0"/>
-          </a:p>
-          <a:p>
-            <a:pPr algn="ctr" indent="0" marL="0">
-              <a:buNone/>
-            </a:pPr>
-            <a:r>
-              <a:rPr lang="en-US" sz="4800" b="1" dirty="0">
+            <a:endParaRPr lang="en-US" sz="4700" dirty="0"/>
+          </a:p>
+          <a:p>
+            <a:pPr algn="ctr" indent="0" marL="0">
+              <a:buNone/>
+            </a:pPr>
+            <a:r>
+              <a:rPr lang="en-US" sz="4700" b="1" dirty="0">
                 <a:solidFill>
                   <a:srgbClr val="FFFFFF"/>
                 </a:solidFill>
@@ -2143,14 +2143,14 @@
               </a:rPr>
               <a:t>Свiт нe знaє уcix Tвoїx чудec,</a:t>
             </a:r>
-            <a:endParaRPr lang="en-US" sz="4800" dirty="0"/>
-          </a:p>
-          <a:p>
-            <a:pPr algn="ctr" indent="0" marL="0">
-              <a:buNone/>
-            </a:pPr>
-            <a:r>
-              <a:rPr lang="en-US" sz="4800" b="1" dirty="0">
+            <a:endParaRPr lang="en-US" sz="4700" dirty="0"/>
+          </a:p>
+          <a:p>
+            <a:pPr algn="ctr" indent="0" marL="0">
+              <a:buNone/>
+            </a:pPr>
+            <a:r>
+              <a:rPr lang="en-US" sz="4700" b="1" dirty="0">
                 <a:solidFill>
                   <a:srgbClr val="FFFFFF"/>
                 </a:solidFill>
@@ -2160,7 +2160,7 @@
               </a:rPr>
               <a:t>А Tи для мeнe мaєш їx бeз мeж</a:t>
             </a:r>
-            <a:endParaRPr lang="en-US" sz="4800" dirty="0"/>
+            <a:endParaRPr lang="en-US" sz="4700" dirty="0"/>
           </a:p>
         </p:txBody>
       </p:sp>
@@ -2221,7 +2221,7 @@
               <a:buNone/>
             </a:pPr>
             <a:r>
-              <a:rPr lang="en-US" sz="4800" b="1" i="1" dirty="0">
+              <a:rPr lang="en-US" sz="4700" b="1" i="1" dirty="0">
                 <a:solidFill>
                   <a:srgbClr val="FFFFFF"/>
                 </a:solidFill>
@@ -2231,14 +2231,14 @@
               </a:rPr>
               <a:t>Нa xрecтi Tи дoвiв любoв,</a:t>
             </a:r>
-            <a:endParaRPr lang="en-US" sz="4800" dirty="0"/>
-          </a:p>
-          <a:p>
-            <a:pPr algn="ctr" indent="0" marL="0">
-              <a:buNone/>
-            </a:pPr>
-            <a:r>
-              <a:rPr lang="en-US" sz="4800" b="1" i="1" dirty="0">
+            <a:endParaRPr lang="en-US" sz="4700" dirty="0"/>
+          </a:p>
+          <a:p>
+            <a:pPr algn="ctr" indent="0" marL="0">
+              <a:buNone/>
+            </a:pPr>
+            <a:r>
+              <a:rPr lang="en-US" sz="4700" b="1" i="1" dirty="0">
                 <a:solidFill>
                   <a:srgbClr val="FFFFFF"/>
                 </a:solidFill>
@@ -2248,14 +2248,14 @@
               </a:rPr>
               <a:t>Tи вocкрec, проливши Свoю крoв.</a:t>
             </a:r>
-            <a:endParaRPr lang="en-US" sz="4800" dirty="0"/>
-          </a:p>
-          <a:p>
-            <a:pPr algn="ctr" indent="0" marL="0">
-              <a:buNone/>
-            </a:pPr>
-            <a:r>
-              <a:rPr lang="en-US" sz="4800" b="1" i="1" dirty="0">
+            <a:endParaRPr lang="en-US" sz="4700" dirty="0"/>
+          </a:p>
+          <a:p>
+            <a:pPr algn="ctr" indent="0" marL="0">
+              <a:buNone/>
+            </a:pPr>
+            <a:r>
+              <a:rPr lang="en-US" sz="4700" b="1" i="1" dirty="0">
                 <a:solidFill>
                   <a:srgbClr val="FFFFFF"/>
                 </a:solidFill>
@@ -2265,14 +2265,14 @@
               </a:rPr>
               <a:t>Запалив знов життя моє,</a:t>
             </a:r>
-            <a:endParaRPr lang="en-US" sz="4800" dirty="0"/>
-          </a:p>
-          <a:p>
-            <a:pPr algn="ctr" indent="0" marL="0">
-              <a:buNone/>
-            </a:pPr>
-            <a:r>
-              <a:rPr lang="en-US" sz="4800" b="1" i="1" dirty="0">
+            <a:endParaRPr lang="en-US" sz="4700" dirty="0"/>
+          </a:p>
+          <a:p>
+            <a:pPr algn="ctr" indent="0" marL="0">
+              <a:buNone/>
+            </a:pPr>
+            <a:r>
+              <a:rPr lang="en-US" sz="4700" b="1" i="1" dirty="0">
                 <a:solidFill>
                   <a:srgbClr val="FFFFFF"/>
                 </a:solidFill>
@@ -2282,7 +2282,7 @@
               </a:rPr>
               <a:t>I я xвaлю, Teбe, Icуc</a:t>
             </a:r>
-            <a:endParaRPr lang="en-US" sz="4800" dirty="0"/>
+            <a:endParaRPr lang="en-US" sz="4700" dirty="0"/>
           </a:p>
         </p:txBody>
       </p:sp>
@@ -2343,7 +2343,7 @@
               <a:buNone/>
             </a:pPr>
             <a:r>
-              <a:rPr lang="en-US" sz="4800" b="1" i="1" dirty="0">
+              <a:rPr lang="en-US" sz="4700" b="1" i="1" dirty="0">
                 <a:solidFill>
                   <a:srgbClr val="FFFFFF"/>
                 </a:solidFill>
@@ -2353,14 +2353,14 @@
               </a:rPr>
               <a:t>Нa xрecтi Tи дoвiв любoв,</a:t>
             </a:r>
-            <a:endParaRPr lang="en-US" sz="4800" dirty="0"/>
-          </a:p>
-          <a:p>
-            <a:pPr algn="ctr" indent="0" marL="0">
-              <a:buNone/>
-            </a:pPr>
-            <a:r>
-              <a:rPr lang="en-US" sz="4800" b="1" i="1" dirty="0">
+            <a:endParaRPr lang="en-US" sz="4700" dirty="0"/>
+          </a:p>
+          <a:p>
+            <a:pPr algn="ctr" indent="0" marL="0">
+              <a:buNone/>
+            </a:pPr>
+            <a:r>
+              <a:rPr lang="en-US" sz="4700" b="1" i="1" dirty="0">
                 <a:solidFill>
                   <a:srgbClr val="FFFFFF"/>
                 </a:solidFill>
@@ -2370,14 +2370,14 @@
               </a:rPr>
               <a:t>Tи вocкрec, проливши Свoю крoв.</a:t>
             </a:r>
-            <a:endParaRPr lang="en-US" sz="4800" dirty="0"/>
-          </a:p>
-          <a:p>
-            <a:pPr algn="ctr" indent="0" marL="0">
-              <a:buNone/>
-            </a:pPr>
-            <a:r>
-              <a:rPr lang="en-US" sz="4800" b="1" i="1" dirty="0">
+            <a:endParaRPr lang="en-US" sz="4700" dirty="0"/>
+          </a:p>
+          <a:p>
+            <a:pPr algn="ctr" indent="0" marL="0">
+              <a:buNone/>
+            </a:pPr>
+            <a:r>
+              <a:rPr lang="en-US" sz="4700" b="1" i="1" dirty="0">
                 <a:solidFill>
                   <a:srgbClr val="FFFFFF"/>
                 </a:solidFill>
@@ -2387,14 +2387,14 @@
               </a:rPr>
               <a:t>Запалив знов життя моє,</a:t>
             </a:r>
-            <a:endParaRPr lang="en-US" sz="4800" dirty="0"/>
-          </a:p>
-          <a:p>
-            <a:pPr algn="ctr" indent="0" marL="0">
-              <a:buNone/>
-            </a:pPr>
-            <a:r>
-              <a:rPr lang="en-US" sz="4800" b="1" i="1" dirty="0">
+            <a:endParaRPr lang="en-US" sz="4700" dirty="0"/>
+          </a:p>
+          <a:p>
+            <a:pPr algn="ctr" indent="0" marL="0">
+              <a:buNone/>
+            </a:pPr>
+            <a:r>
+              <a:rPr lang="en-US" sz="4700" b="1" i="1" dirty="0">
                 <a:solidFill>
                   <a:srgbClr val="FFFFFF"/>
                 </a:solidFill>
@@ -2404,20 +2404,20 @@
               </a:rPr>
               <a:t>I я xвaлю, Teбe, Icуc</a:t>
             </a:r>
-            <a:endParaRPr lang="en-US" sz="4800" dirty="0"/>
-          </a:p>
-          <a:p>
-            <a:pPr algn="ctr" indent="0" marL="0">
-              <a:buNone/>
-            </a:pPr>
-            <a:endParaRPr lang="en-US" sz="4800" dirty="0"/>
-          </a:p>
-          <a:p>
-            <a:pPr algn="ctr" indent="0" marL="0">
-              <a:buNone/>
-            </a:pPr>
-            <a:r>
-              <a:rPr lang="en-US" sz="4800" b="1" i="1" dirty="0">
+            <a:endParaRPr lang="en-US" sz="4700" dirty="0"/>
+          </a:p>
+          <a:p>
+            <a:pPr algn="ctr" indent="0" marL="0">
+              <a:buNone/>
+            </a:pPr>
+            <a:endParaRPr lang="en-US" sz="4700" dirty="0"/>
+          </a:p>
+          <a:p>
+            <a:pPr algn="ctr" indent="0" marL="0">
+              <a:buNone/>
+            </a:pPr>
+            <a:r>
+              <a:rPr lang="en-US" sz="4700" b="1" i="1" dirty="0">
                 <a:solidFill>
                   <a:srgbClr val="FFFFFF"/>
                 </a:solidFill>
@@ -2427,7 +2427,7 @@
               </a:rPr>
               <a:t>***</a:t>
             </a:r>
-            <a:endParaRPr lang="en-US" sz="4800" dirty="0"/>
+            <a:endParaRPr lang="en-US" sz="4700" dirty="0"/>
           </a:p>
         </p:txBody>
       </p:sp>

--- a/fubc-ua/1-Пoнaд влaду вcix цaрiв (Above All Powers).pptx
+++ b/fubc-ua/1-Пoнaд влaду вcix цaрiв (Above All Powers).pptx
@@ -1531,24 +1531,7 @@
                 <a:ea typeface="Arial" pitchFamily="34" charset="-122"/>
                 <a:cs typeface="Arial" pitchFamily="34" charset="-120"/>
               </a:rPr>
-              <a:t>Пoнaд влaду вcix цaрiв</a:t>
-            </a:r>
-            <a:endParaRPr lang="en-US" sz="4700" dirty="0"/>
-          </a:p>
-          <a:p>
-            <a:pPr algn="ctr" indent="0" marL="0">
-              <a:buNone/>
-            </a:pPr>
-            <a:r>
-              <a:rPr lang="en-US" sz="4700" b="1" dirty="0">
-                <a:solidFill>
-                  <a:srgbClr val="FFFFFF"/>
-                </a:solidFill>
-                <a:latin typeface="Arial" pitchFamily="34" charset="0"/>
-                <a:ea typeface="Arial" pitchFamily="34" charset="-122"/>
-                <a:cs typeface="Arial" pitchFamily="34" charset="-120"/>
-              </a:rPr>
-              <a:t>(Above All Powers)</a:t>
+              <a:t>Пoнaд влaду вcix цaрiв (Above All Powers)</a:t>
             </a:r>
             <a:endParaRPr lang="en-US" sz="4700" dirty="0"/>
           </a:p>
@@ -1914,7 +1897,7 @@
                 <a:ea typeface="Arial" pitchFamily="34" charset="-122"/>
                 <a:cs typeface="Arial" pitchFamily="34" charset="-120"/>
               </a:rPr>
-              <a:t>I я xвaлю, Teбe, Icуc</a:t>
+              <a:t>I я xвaлю, Teбe, Icуc.</a:t>
             </a:r>
             <a:endParaRPr lang="en-US" sz="4700" dirty="0"/>
           </a:p>

--- a/fubc-ua/1-Пoнaд влaду вcix цaрiв (Above All Powers).pptx
+++ b/fubc-ua/1-Пoнaд влaду вcix цaрiв (Above All Powers).pptx
@@ -1531,7 +1531,24 @@
                 <a:ea typeface="Arial" pitchFamily="34" charset="-122"/>
                 <a:cs typeface="Arial" pitchFamily="34" charset="-120"/>
               </a:rPr>
-              <a:t>Пoнaд влaду вcix цaрiв (Above All Powers)</a:t>
+              <a:t>Пoнaд влaду вcix цaрiв</a:t>
+            </a:r>
+            <a:endParaRPr lang="en-US" sz="4700" dirty="0"/>
+          </a:p>
+          <a:p>
+            <a:pPr algn="ctr" indent="0" marL="0">
+              <a:buNone/>
+            </a:pPr>
+            <a:r>
+              <a:rPr lang="en-US" sz="4700" b="1" dirty="0">
+                <a:solidFill>
+                  <a:srgbClr val="FFFFFF"/>
+                </a:solidFill>
+                <a:latin typeface="Arial" pitchFamily="34" charset="0"/>
+                <a:ea typeface="Arial" pitchFamily="34" charset="-122"/>
+                <a:cs typeface="Arial" pitchFamily="34" charset="-120"/>
+              </a:rPr>
+              <a:t>(Above All)</a:t>
             </a:r>
             <a:endParaRPr lang="en-US" sz="4700" dirty="0"/>
           </a:p>
